--- a/revisionDay4/slides.pptx
+++ b/revisionDay4/slides.pptx
@@ -1146,6 +1146,94 @@
 </inkml:ink>
 </file>
 
+<file path=ppt/ink/ink8.xml><?xml version="1.0" encoding="utf-8"?>
+<inkml:ink xmlns:inkml="http://www.w3.org/2003/InkML">
+  <inkml:definitions>
+    <inkml:context xml:id="ctx0">
+      <inkml:inkSource xml:id="inkSrc0">
+        <inkml:traceFormat>
+          <inkml:channel name="X" type="integer" min="-2.14748E9" max="2.14748E9" units="cm"/>
+          <inkml:channel name="Y" type="integer" min="-2.14748E9" max="2.14748E9" units="cm"/>
+          <inkml:channel name="F" type="integer" max="32767" units="dev"/>
+        </inkml:traceFormat>
+        <inkml:channelProperties>
+          <inkml:channelProperty channel="X" name="resolution" value="1000" units="1/cm"/>
+          <inkml:channelProperty channel="Y" name="resolution" value="1000" units="1/cm"/>
+          <inkml:channelProperty channel="F" name="resolution" value="0" units="1/dev"/>
+        </inkml:channelProperties>
+      </inkml:inkSource>
+      <inkml:timestamp xml:id="ts0" timeString="2026-04-05T14:56:22.441"/>
+    </inkml:context>
+    <inkml:brush xml:id="br0">
+      <inkml:brushProperty name="width" value="0.05292" units="cm"/>
+      <inkml:brushProperty name="height" value="0.05292" units="cm"/>
+      <inkml:brushProperty name="color" value="#FF0000"/>
+    </inkml:brush>
+  </inkml:definitions>
+  <inkml:trace contextRef="#ctx0" brushRef="#br0">5941 2532 15771,'2'3'5606,"0"-2"-4216,-2-1-1043,-24-19-269,17 14 51,-19-14-39,16 19-34,-8 0-12,-15 1 18,-17 3-31,19-2 0,-2 0-1,-2 1 1,0 0 5,2-1 1,1 1 25,-20 3-51,19 1-6,16 2-5,12 6 6,3 9 22,2 8 11,0 8 17,0 6-5,-1 4 21,-4-1 12,-4-3-5,-3-8 16,-1-6 6,4-10-12,3-7 79,4-9 146,1-3 403,1-3-532,4-5-112,2-2-39,8-6-23,2 1 0,6-1-5,6 4-18,9 3-16,8 4 17,6 8-11,1 7 5,-14 2-73,-1 19 6,-27-4-44,-12 17-68,-28-5 50,8-20 0,-5-2-2018,-7 2 1,-2-2 1659,-12 6-1064,-9-2-4157,39-19 5158,1-3 0,13-3 0,4-1 0</inkml:trace>
+  <inkml:trace contextRef="#ctx0" brushRef="#br0" timeOffset="344">6256 2706 20969,'-31'31'351,"0"0"1,0 1-1,-11 10 1,9-1-190,17 11 6,19-7 0,18-9-28,21-10-17,12-12 57,8-9-769,-2-15 880,-8-11 101,-13-11 135,-13-8-291,-14 7 537,-14-20-488,-12 17-78,-12-13-89,-7 18-34,-5 9-50,-8 10-51,14 6-187,-8 12-1387,21 7 1591,2 13 0,8-11 0,6 2 0</inkml:trace>
+  <inkml:trace contextRef="#ctx0" brushRef="#br0" timeOffset="1250">8243 2676 23058,'-60'-12'128,"-1"0"1,-4 13 0,11 12-118,29 22-5,4 1 0,3 1-6,8 15-28,9 9 0,13-30 0,7-2-28,28 11 28,-11-22 0,3-5-458,22-2 475,1-8-1988,-13-12 0,0-3 2010,5-1 14,4-9 0,-4-4 894,-21 3-869,-8 1 0,-2-2 57,-6-5-6,-2-9 50,-8 6 73,-10 9-6,-7 13-207,-3 11 3432,-20 27-3410,8 4-33,-6 7-11,13 3-17,16-12-22,14 5-6,16-8-40,32-9 68,-15-9 11,-2-11 1,-1-5 16,6-11 19,-14 3 1,-2-3 14,4-10 89,-4-22-62,-23 21 40,-5-4 0,-5 0-11,-7 5 50,-8 0 0,-3 2-34,-3 8 96,-25-7-29,4 20-122,-1 8-40,2 4 6,5 22-34,19-9-1808,3 8 0,4 2 1568,4 0-822,5 6 1,5 0-3157,15 4 4235,1-11 0,2-2 0,2-4 0,5-7 0</inkml:trace>
+  <inkml:trace contextRef="#ctx0" brushRef="#br0" timeOffset="1627">9021 2811 23909,'12'-53'146,"-2"20"-135,-13 59-9,-1 6 1,0 1-3,0 0 6,0 1 0,0 1-6,0-2 11,2 3 6,1-11 27,1-12 248,8-12-124,5-12-90,3-3 236,16-24-96,-8 6-56,12-16-3419,-7 7 3308,-5 10 22,9-4 27,6 7-77,2 4-46,3 6 18,-14 19-6,-5 12 5,-9 2-240,7 28-46,-11-17-1319,4 8 1,0 1-2529,0-2 4139,11 23 0,-19-40 0,0-1 0</inkml:trace>
+  <inkml:trace contextRef="#ctx0" brushRef="#br0" timeOffset="2434">9908 2767 24956,'-12'-36'174,"1"17"-129,5 73-17,-4 4-6,-5 3-11,2-13 0,4-15 1,0-3-1,0-1 17,-5 22-11,11-35 67,-2 2-5,6-14 178,9-18-156,-3 2 140,13-22 128,1-7-184,1-4-65,-5 12 1,-1 1-48,5-4 56,11-11-29,-9 23-49,6 0-23,-4 8-28,5 12 5,-10 7-5,9 14-44,-8 8-124,14 23 56,-11-13-62,4 9-1024,-5-2-371,-3-9-504,10 10-542,-2-21-589,4-11 1792,-3-11-189,21-15 2430,-12-2 1025,13-10 380,-17 5-139,-12 1-331,-9 4-453,-8 5-303,-11 6-235,-6 2-493,-1 3 230,-6 1-358,12 3-63,-2 1-22,9 2 1,5 0-29,6 0-6,8-1-16,-1-3 6,19-2 5,-8-6-6,13-4-11,-9-7 6,-5-6 22,-4-5 17,-8-4 17,-7 0 5,-13 3 18,-9 4 10,-9 7 12,-5 7-1,1 8-55,1 9-29,4 8-21,4 3-12,-3 22-17,8-2-45,0 20-190,12-3-666,12 1-2420,12-1-2244,3-12 5582,6-2 0,-19-25 0,0-1 0</inkml:trace>
+  <inkml:trace contextRef="#ctx0" brushRef="#br0" timeOffset="2927">11518 2932 20800,'2'-6'4072,"0"1"-2358,-2 5-1529,-90-38-168,62 36-14,-23-15 0,4 8 19,34 30 17,-5 35-33,7-3-239,4-12 0,3 0 188,6-7 1,5-1-163,15 25-138,3-30 1,3-5 137,13 7-82,-7-17 0,0-4 210,13-6 79,15-12 22,-30 0 1,-1-3 33,3-5 1,0-3-13,1-5 1,0-3-559,3-6 0,0-3 547,2-8 1,0-3-18,-13 13 1,1-2 0,-2-1 35,0-1 1,-1-1-1,-2 0 37,-1 1 1,-2-1 0,-2 1 94,3-16 1,-5 2 0,-5 6 0,-4 3 82,-5 7 0,-5 2 35,-6-17-22,-8 20-252,5 16 311,-2 15-300,3 20-17,-7 22-25,6-10 1,-1 5-204,0 3 0,-1 4 1,2-2 196,-2 5 1,0 0-12,-2 12 1,1 2-609,6 0 0,6-1 216,4-12 0,3 2-298,0-6 1,2 3-1,2-3-547,8 1 0,4-4-1953,-1-7 1,1-4 3209,11 8 0,-13-19 0,-10-13 0</inkml:trace>
+  <inkml:trace contextRef="#ctx0" brushRef="#br0" timeOffset="3277">11979 3089 25500,'17'-44'-26,"0"0"0,16 1 0,9 11-129,8 22 1,4 7-1012,-1-2 1,1 1 873,1 2 1,-1 0 25,-11 1 0,-1-1 118,8 0 0,0-2 64,-2-3 1,-4-1 195,10-4 838,-10-6-14,-41 5-606,-4 3 326,-19-1-57,-2 6 887,-5 0-1178,2 3 627,7 3-851,3 9-28,2 11-50,3 14-29,4 25-98,11-25 1,4 1-233,1 1 1,3-2-363,7-1 1,3-3-1557,4-7 0,0-4-2484,9 4 4755,4-7 0,-31-15 0,-1-1 0</inkml:trace>
+  <inkml:trace contextRef="#ctx0" brushRef="#br0" timeOffset="3464">12990 2551 25746,'-27'-21'-381,"0"-1"0,-14-10-1450,58 76-8000,14 11 8001,-8-13 0,2-2 0,-20-33 1</inkml:trace>
+  <inkml:trace contextRef="#ctx0" brushRef="#br0" timeOffset="3860">13433 2855 26922,'-43'28'30,"0"1"0,3 6 0,11 0-30,27-7 28,16 30-28,-1-35 17,33 18-6,-12-28-4274,18 2 4263,-20-15 921,8-18-887,-22 1 13,-2-9 1,-1-4 36,-5-17-45,0-10 57,-7 2 116,-10 12-139,2 9 95,-18 2-151,8 25-11,-22 3-12,19 7-100,-16 16 22,23-4 2568,2 38-3032,14-26-1066,17 29-1282,7-24-5451,15 3 8347,-2-11 0,-14-11 0,-11-7 0</inkml:trace>
+  <inkml:trace contextRef="#ctx0" brushRef="#br0" timeOffset="4193">13821 3036 15855,'6'-5'8317,"0"2"-7732,23-21 1,6-7 237,-8 5-512,11-8 0,-3 1 148,-20 14-235,-8 8-179,-5 7-23,-2 5 18,0 13-12,3 26-28,-2-5 2,2 3 1,-1 3-14,-1 9-9,-2-14 1,0-1 24,1 7 7,-2 0 10,2-27 17,2 1-16,7-27 38,9-13 1,11-18-40,-2 3 17,-7 11 1,1 0 13,2 0 0,1 1-118,0 1 0,1 1 118,3 0 1,-1 4-26,6 3 73,11 14-73,-14 15-34,5 4-56,1 29-240,-18-5-264,-7-8 1,-1 1-3619,-4 26 4184,-6-9 0,-1-18 0,0-15 0</inkml:trace>
+  <inkml:trace contextRef="#ctx0" brushRef="#br0" timeOffset="5311">16668 3310 21226,'15'-47'655,"1"0"0,0 0 1,-1 4-1,0 1 1,0 3-483,2-1 1,-1 3 75,0 4 0,-2 3 233,1-3-364,-3 10-90,-7 19 28,-6 29 22,-2 25-44,0-13 0,-1 3-1699,-1 5 0,-1 2 1687,0 3 1,0-1-12,0-1 0,1-1 0,-1 0 1,1-3-7,-1 11 18,0-9 156,-1-33-117,2-10 10,-8-30-32,4-16-29,-2-15-6,6-2 0,4 21 1,3-6 0,1 2 1046,2-6 1,2-2-1046,1 6 0,1-5 0,0-1 0,1 7-1146,4-4 0,1 2 1146,1 6 0,2-2 1,0 5 11,0 5 1,1 3-153,4-4 0,2 1 121,0 8 1,0 3-145,27-5 145,2 15 5,-4 20 887,-12 5-895,-16 10 0,-4 7 3,-4 27 692,-11-13 1,-6 3-682,-12-2 0,-7-1-9,-10 2 1,-6-2-6,-5-2 0,-4-2 14,0-3 0,0-4 11,3-4 0,2-3 6,7-6 0,4-2 383,-13 7-394,22-8 201,22-6-179,23 0-28,25 0-3,4-5 1,2 0 43,-13-1 1,1-1-65,4 0 1,3-1 0,-2 1-68,3-1 1,0-1-149,12 1 0,1 0-183,-3-2 1,-2 0-101,-4-2 1,-1-2 10,-6-1 1,-3-3 307,-11 2 0,-2-3-137,2-9 0,-3-3 238,1-16 180,5-17 224,-21 11 268,-8 8 118,-8 13 1085,-10 9-1057,-10 7-151,-9 5-218,-2 3-208,4 3-101,7 4-6,10 3-10,8 3-6,13 3-12,12 0-5,15-1 6,11-7 5,6-5 11,0-9 29,-6-9 33,-10-10 39,-10-6 17,-12-5 17,-7-2 16,-13 2-10,-8 4 22,-11 6 39,-17 8-163,10 6 12,-17 8-34,14 8 0,-6 8-11,5 7-95,12 22-28,11-10-482,26 26-652,4-36 0,6-2-2347,13 8 0,4-2 3576,1-2 0,-1-3 0,-11-7 0,-2-3 0,6 2 0</inkml:trace>
+  <inkml:trace contextRef="#ctx0" brushRef="#br0" timeOffset="6584">18628 3191 15322,'3'-7'6801,"0"2"-6278,6-30 1,0-7-99,-4 13 225,6-25 0,-3 3-404,-9 33-67,-2-9 141,-15 26-208,-8 12-28,-21 12-1738,13 3 0,1 2 1665,8-8 0,1 2-5,-10 12 0,3 2-18,3 13 4,12-20 0,6 2 8,12 2 0,6-1 5,18 8-5,13-5 6,-2-28-1,3-13 7,3-9 4,12-13 35,-6-11 30,-25 13 0,-2-2-25,4-10 73,-2-14 22,-19 21 3415,0-3-3381,-4 9-90,-2 11 73,-2 5-129,-1 9-28,-3 9-5,-9 29-6,-2 14-6,-2 7 0,7-11 1,1-1-608,1 6 526,1-2 0,2 2-123,5-20 0,2-1-109,2 4 0,4-2-656,23 15 499,11-29 336,7-18 153,-7-20 0,7-11 0,-7 3 15,-11 9 0,-2-2-107,15-10 0,7-5 0,-8 1 213,-11 2 1,-4 2-26,0-1 0,-1 0 34,-1-4 0,-3 2 48,-2-4-1,-11 9 365,-7 4-398,-1 10 681,-3-4-692,0 13-96,-2 4-39,2 5-16,-7 26 10,4-8-8,1 11 1,1 1-4,2 2-8,3-3 0,5 2-42,11 7-45,5-13 0,4-3 23,24 9 75,-16-20 0,0-6 385,9-8-366,16-24 12,-30 3 11,-3-2 1,-1-3 38,5-16-22,-8 6 0,-1-1-28,6-15 0,-9 14 0,-2 1-5,3-7-23,4-13-40,-7 19-139,-4 7 0,-6 19-571,0 10-903,1 12-2212,1 9 3865,2 15 0,-3-16 0,-2 1 0</inkml:trace>
+  <inkml:trace contextRef="#ctx0" brushRef="#br0" timeOffset="7134">20011 3322 26200,'24'-48'134,"3"2"-106,7 15 23,1-5-29,-5-4-16,-9 8 111,-6-2-16,-14 20-50,-4 0 133,-26 15-72,-3 11-16,-19 9-46,14 1 17,-6 14-33,21-13-18,3 8 1,2 3 0,8 8-14,5-8 0,5 0-3,24 9-11,18-4 5,-1-12-14,-3-11 1,4-5-425,17-2 444,-16-4 0,1-4 2,-12-6 1,-2-3 14,25-19 0,-9-14-1637,-24 8 1,-3-3 1641,6-14-3,-13 18 1,-4 0 109,-1-16 112,-6-11-135,-2 10 230,-5-10-196,2 36-78,-1-4-29,6 16 270,7 8-297,2 5 22,24 23-23,-13-4-8,4 14 1,0 4-7,-11-9 1,-2 0 948,7 16 1,-2 1-947,-7-17 1,-3 1-263,-2 11 1,-5-1 143,-13 8-191,1-14 1,-5-3-1237,-23 8-281,4-14 1160,-4-8 0,27-13 0,-4-2 1</inkml:trace>
+  <inkml:trace contextRef="#ctx0" brushRef="#br0" timeOffset="7511">21146 3357 26101,'5'-43'172,"1"-1"0,-1 1 0,2-21 1,1 3-123,-1 16 0,-1 1-659,1-6 1,0 1 639,-1 10 0,0-1 123,2-16 0,-1 3 109,-1-4 91,-2 20 1,0 2-142,-3 8 85,-2 15-247,-1 8-13,-3 10 24,-11 26-62,4-2-6,-1 7 0,2 4 81,3-2 1,3 2-85,-2 13 1,2 5-18,5-17 0,1 1 0,2 0-557,3 1 1,1 0 0,3-1 414,3 1 0,3-2 0,1 0-146,3-2 1,2-2 0,2-1-405,11 12 1,3-4-476,-2-9 1,2-4-3040,-4-9 1,0-5 4231,21 0 0,-22-13 0,-16-5 0</inkml:trace>
+  <inkml:trace contextRef="#ctx0" brushRef="#br0" timeOffset="7693">21174 3105 23873,'45'-20'-625,"0"1"0,0 0 0,-1 1 0,0 1 0,-1 5 625,17 9 0,-4 5 0,7-3 0,-7 1 0</inkml:trace>
+  <inkml:trace contextRef="#ctx0" brushRef="#br0" timeOffset="8401">5408 3745 8847,'-39'-5'2319,"-1"1"0,3-4-1809,63 7-1,13 1 1,9-1-34,5 0 1,6 1-1040,-3-1 1,5 1 0,2-1 791,-7 1 1,1-1-1,3 1 1,4-1-344,-12 1 1,2 0 0,4-1 0,0 1 0,0-1 0,-2 1 0,-2-1 187,6 1 0,-4-1 0,0 1 0,2-1 0,5 0-237,-8 1 0,5-1 0,2 0 1,2 0-1,0 0 0,0 0 0,-1 0 1,-4 1 210,-2-1 1,-2 0 0,-2 0 0,0 0 0,2-1-1,2 1 1,4 0-123,-7 0 1,4 0 0,2-1 0,2 1 0,1-1 0,1 1 0,0-1 0,-1 1 0,-1-1 0,-3 1-1,-2-1 97,6 1 1,-4-1 0,-2 1 0,0 0 0,-1-1 0,2 1 0,2-1 0,3 1-19,-9-1 1,3 1 0,2-1-1,1 0 1,1 1 0,0-1 0,1 1-1,-1-1 1,0 0 0,-2 1 0,-2-1-1,-2 1 58,12-1 0,-4 0 0,-1 1 0,-2-1 0,1 1 0,0-1 0,2 1 0,2-1-24,-8 1 0,1 0 1,2-1-1,0 1 0,1 0 1,0 0-1,1-1 0,0 1 1,0 0-1,-1 0 0,1 0-8,0 0 0,1 0 0,0 0 0,0 0 0,0 0 0,1 0 0,-1 0 0,1 1 1,-1-1-1,1 0 0,0 1-9,-4-1 0,0 0 1,0 1-1,1-1 1,-1 1-1,1-1 0,-1 1 1,1 0-1,0-1 1,0 1-1,0 0 1,0 0-8,1 0 1,1 0 0,-1 0 0,1 0 0,-1 0 0,1 1 0,0-1 0,0 0-1,0 1 1,0-1 0,1 0 0,-1 1-1,-3-1 0,-1 1 0,1-1 0,0 1 0,0 0 0,0-1 0,0 1 0,0 0 1,0-1-1,0 1 0,0 0 0,1 0 0,-1 0-3,1 0 1,0 0 0,0 0 0,0 0 0,1 1 0,-1-1 0,0 0 0,1 1 0,-1-1 0,1 0 0,-1 1 0,1-1 0,-1 1-2,1 0 0,0-1 0,0 1 0,0 0 1,1-1-1,-1 1 0,0 0 0,0 0 1,1 0-1,-1 0 0,0-1 0,0 1 1,0 0-2,1 0 1,-1 0 0,0 0 0,0 1-1,0-1 1,0 0 0,0 0 0,0 0-1,1 0 1,-1 1 0,0-1 0,0 0 0,-1 0-5,1 1 1,-1-1 0,1 0 0,-1 1 0,1-1 0,-1 1 0,0-1 0,1 0 0,-1 1-1,0-1 1,0 1 0,0-1 0,0 1 1,-1-1 0,1 0 0,-1 1 0,0-1 1,0 1-1,0-1 0,0 1 0,-1-1 1,1 0-1,0 1 0,-1-1 0,1 1 1,-1-1 4,5 1 1,-1-1-1,0 1 1,1 0-1,-1-1 1,0 1-1,0-1 1,0 1-1,-1 0 1,1-1-1,-1 1 1,1-1 1,-2 1 1,0-1 0,-1 1 0,1-1 0,0 0 0,-1 1 0,0-1 0,0 1 0,0-1 0,0 0-1,0 1 1,0-1 1,3 0 1,-1 1 0,1-1 0,-1 0 0,-1 1 0,1-1 0,0 0 0,1 1 0,-1-1-1,1 0 1,1 0-2,-6 0 1,0 0 0,2 0 0,-1 0 0,1 0 0,0 0 0,0 0-1,0-1 1,-1 1 0,0 0 0,-1 0 0,-1-1 0,-1 1-11,8 0 0,-2-1 0,-1 1 0,-1-1 0,0 1 1,-1-1-1,0 1 0,1-1 0,0 0 0,1 1-14,2-1 0,2 0 0,1 0 0,0 1 1,0-1-1,-1 0 0,-1 0 0,-2 0 1,-3 0-1,-3-1-38,9 1 0,-5 0 1,-2-1-1,-2 1 0,1-1 1,1 0-685,2 1 0,2-1 0,1 0 0,-3 0 0,-2 0 0,-4 0 730,0 0 0,-4-1 0,-3 1 0,0 0 0,12 0 0,-3 0 0,-6 0 0,-11-1 0,1 0 0</inkml:trace>
+  <inkml:trace contextRef="#ctx0" brushRef="#br0" timeOffset="15544">5549 4828 18358,'-3'-2'4112,"1"0"-3580,2 2-499,-5-61-10,17 39-18,-7-13 1,4 3 0,25 22 5,3 7-22,3 10-1,-2 9-21,-2 10-40,-8 8 56,-8 9 34,-12 4 5,-16 4 12,-11-1 56,-17-2-29,11-20 158,-4-5 49,19-19-55,2-3-90,5-6-44,4-1-29,4-3-22,3 1-11,6 4-17,6 3 6,7 9-6,6 6-12,5 10 1,0 6-22,-4 5 5,-8 2 11,-11 3 17,-15 2-6,-19 2-44,-17-3-143,9-22 0,-2-2 95,-3-4 0,-1-2-93,-2-3 1,1-4-415,-29-8-863,16-12-2447,22-17-784,20 1 3875,17-7 1,-4 23 0,3 0-1</inkml:trace>
+  <inkml:trace contextRef="#ctx0" brushRef="#br0" timeOffset="15886">6394 4807 20923,'-51'19'418,"0"-1"1,5 2 0,6 3-263,4 29-55,12 6-22,12-1 5,26 4-34,1-24 56,31-1 6,3-25-8,-9-9 0,0-3-20,18-5-218,-19-5 1,-3-3 480,5-18 106,1-12-21,-15-6-85,-16-1 48,-23 3-297,-7 23 0,-5 2-64,-14-5-115,4 13 0,-1 4 98,-11 5-90,-7 2-297,15 9-1188,16 5 1558,17 12 0,4-11 0,5 4 0</inkml:trace>
+  <inkml:trace contextRef="#ctx0" brushRef="#br0" timeOffset="16702">9134 4946 14409,'1'-7'5647,"0"1"-4726,-2-28 0,-3-6-506,-3 18-132,-2-20 0,-4 5 81,-18 32-56,-18 11-205,18 4 1,-1 3-51,-4 6 0,-1 4-22,-8 15 0,1 3-477,13-12 1,3 1 428,-7 17 0,6 1-22,17-16 0,4 0-45,-1 8 0,7 0-191,15 2 1,7-3 16,13 12 110,-5-25 0,7-5-404,14-8 0,3-7 266,-7 0 1,4-3 113,4-5 0,6-2 0,-3-4 164,6-5 0,-3-6-864,-14 1 1,1-2 0,-5-1 924,-1-2 1,-3-2 66,4-6 1,-4-1-122,-11 8 1,-2-1 210,4-4 0,-3 0 737,12-21-673,-19 22 68,-26 9-286,-5 19-1611,-43 22 1583,23-3-14,-5 9 0,0 4 984,3 12-1012,12-12 0,4 0 237,4 7-246,16 2-5,13-13-5,24 2 38,-8-15 26,4-12 0,0-5 8,-2-7 1479,-1-2 0,0-5-1311,4-13 14,-14 5 1,-2-2-49,3-10 1599,-10-15-1480,-12 15-57,-7-8-17,-5 3-61,-7 8-78,-4 10-96,-8 9-78,4 10-7,1 6-278,4 13-1188,6 17 509,3-4-7712,10 30 8771,13-28 0,-2 4 0,0-22 0</inkml:trace>
+  <inkml:trace contextRef="#ctx0" brushRef="#br0" timeOffset="17268">9945 5168 20033,'0'-7'4150,"0"2"-3718,9-57 116,-4 34-371,0-10 0,1 2-99,-2 21-95,-1 6 6,0 11 22,2 9 1,5 9-1,3 13-6,4 16-5,-6-14-16,2 13 21,-8-23 1,0-1 5,-2-5 23,-1-13 195,-1 0 18,1-7-85,0-6-117,0 0 106,3-20-22,5-6-96,0 0-10,3 0 5,7 4-23,-5 12-21,23-12 10,-19 23-16,21-3-12,-5 22 17,1 5-5,3 15-1,-11 12 12,-13-14 6,-5 14 10,-8-24 6,-4 10-5,0-16 145,-2 2-67,2-12 79,0-15-141,3-1 73,6-36-11,3 8 23,9-19-12,-1 13-56,-1 13 28,8 2-67,-3 15-3403,14 1 3392,-8 9-17,10 11-241,12 27 79,-16-9-340,-8 4 1,-6 4-3834,-8 15 4363,-3 6 0,-7-18 0,-2-15 0</inkml:trace>
+  <inkml:trace contextRef="#ctx0" brushRef="#br0" timeOffset="18093">11106 5326 13329,'-3'-6'7796,"0"1"-7185,-11-24 0,-1-7 475,8 4-966,-9-6 1,3 3 69,14 15 101,1 13-268,0 4 5,3 8-6,0 9 1,4 14 27,-1 11-28,0 9 1,-3 2 10,-2-6 23,-1-10 146,-2-15 308,0-10 95,0-8-297,0-10-196,0-10 6,0-17-40,1-24-50,2 16 45,5-18-34,4 28-11,6-3-6,6 7-16,5 10 5,7 8-11,4 10-5,7 12-18,1 10-10,-1 15 16,-5 8-297,-10 7 303,-12 1 5,-9-5 0,-9-7 34,-6-13 17,-2-11-11,-1-9 33,-3-14 269,2-9-291,-2-14-11,5-9 44,8-12-67,1 17-5,12-10 5,1 24-11,8-1-5,4 10-63,11 11 35,-11 5-62,14 16-141,-12 8-301,10 14-617,-2 5-1103,-1 3-2292,-1-4 4549,3-8 0,-19-18 0,-2-7 0</inkml:trace>
+  <inkml:trace contextRef="#ctx0" brushRef="#br0" timeOffset="19042">12262 5232 23075,'-16'-38'84,"5"11"-40,19 38 35,7 0 22,8-4 44,5-3 57,0-9 72,-2-4 57,-4-11-1,-7-6-16,-7-7-23,-6-3-61,-8-1-68,-4 4-22,-7 6-16,-2 7-63,-4 10-38,-5 7-1,-6 13-28,-4 10-5,2 13-17,7 11-33,13 2-57,13 3-112,16-2-117,15-4-191,16-5 23,-11-21 0,1-4 235,17 3 98,-14-11 0,0-6 36,15-13-21,-22 3 0,0-2 324,23-21 128,-12-5 91,-14 0 27,-9 1 11,-7 2-27,-4 8-35,-3 7-110,-2 9-248,-1 6-72,0 5 16,-1 10 447,3 12-380,0 16 1,0 12 5,-1 7-17,-1 0 29,-1-7-23,1-9 0,0-13 22,2-13 40,4-11-40,1-6 12,12-13-1,3-6 12,10-10-11,2-2 5,2 2-33,-14 12-23,-2 7 6,-15 13-12,1 8 18,0 8 21,7 18-16,-3-9 17,10 14-11,2-17 5,13 3-22,13-8 5,8-8 6,5-10 0,-3-11-223,-5-15 263,-6-14-21,-22 5 1,-3-4-9,-3 2 0,-3-2 0,0-2 1,-1 0 32,-3-3 1,-3 3 62,1-9 100,-4 7 0,-2 0 179,-2-9-229,1 0-17,-4 23 107,-1 22-287,1 4 1,-2 7 39,-1 14-25,0 15 0,0 7-1,2-4 1,-1 2-1571,1 11 1,1-1 1572,1-12 1,4 0-1317,8 12 1,3-1 1030,5 13-358,-3-20 0,4 4 0,-1-6-367,-2-10 0,2-3-2189,8 9 1,0-3 3221,9-4 0,-15-15 0,-11-8 0</inkml:trace>
+  <inkml:trace contextRef="#ctx0" brushRef="#br0" timeOffset="19469">13417 5119 17311,'-4'-3'3372,"1"1"-1989,3 2-1344,71-20-21,-33 16-16,18-5 1,8 1-15,-14 10 1,-1 2-311,3-1 1,1-1 301,7 1 1,-1-1-315,-13-2 1,-2 0 308,-3-1 0,-2-2 14,18-1 58,-24-4 1,-1-1 132,-1-7-23,6-4 666,-25-2-190,-13 7-337,-3-2 242,-14 3-84,-4 5 354,-6 0-466,-3 4 501,13 3-798,4 1-28,12 5 22,4 12-28,2-1 17,14 35-17,-5-21-11,2 1 0,0 3-9,1-1 1,0 0-3,1 1 0,-1 1-37,3 5 1,-2-2-323,7 16-706,-10-10-1618,-7-11-100,-8-14 2794,-11-8 0,6-8 0,-5-2 0</inkml:trace>
+  <inkml:trace contextRef="#ctx0" brushRef="#br0" timeOffset="19608">14174 5252 23002,'-45'15'-135,"9"-3"135,13 31 0,4 5 0,5-18 0,-14 26 0</inkml:trace>
+  <inkml:trace contextRef="#ctx0" brushRef="#br0" timeOffset="23902">5848 6974 19776,'-49'-6'302,"0"1"0,3 0 1,4 5-40,-10 16 22,-3 2-627,-2 1 572,-3-1-68,6-3-33,10-5-56,18-3 469,11-4-268,12-2 54,1-1-115,2 0-163,7 7 1,1 3 301,8 11-324,0 6 0,-5-1 39,-2 24-11,-8-9 0,-8 21-260,-10-9 294,-10-1 27,-6-7-38,6-14 425,-2-6-241,19-18 550,-1 0-517,10-13-133,2-3 237,4-7-316,5-5-28,9-2-39,8-1-6,14 2-17,12 4-372,-20 11 1,2 3 360,5 2 1,0 2-10,4 4 1,0 2-31,0 3 0,-1 2-11,-2 3 0,-4 2-17,-5 1 0,-4 3-129,7 24-62,-33 6 107,-16-7-59,-19-7 1,-9-2 35,7-9 1,-3-3-305,-6 6 0,-3-2-827,-10-5 0,1-6-2400,23-8 1,1-2 3721,-10 1 0,4-2 0,8-4 0,18-3 0</inkml:trace>
+  <inkml:trace contextRef="#ctx0" brushRef="#br0" timeOffset="24269">6213 7189 20788,'-11'47'106,"-1"0"1,0 0-1,2-3 1,1 0 0,6-4-135,7-1 0,5-3-12,4-2 1,3-2 19,4-6 0,2-4 127,27 8 654,-1-16-111,7-24-295,-19-1 0,-7-10 1,-2-3-104,-4-1-23,-2 0 1,-3-2 134,1-10-50,-4-10 24,-7 1-69,-24-4-235,2 19-26,-14 9 0,-4 4-19,-4 5-45,-2 4 0,-2 2-403,-16 5-895,23 5 1,0 2 1353,-17 6 0,22 0 0,16-4 0</inkml:trace>
+  <inkml:trace contextRef="#ctx0" brushRef="#br0" timeOffset="24794">8360 7786 19608,'8'-3'3674,"-2"0"-3145,1-27 0,-2-10-1040,3-7 721,1-5 1,0-4-63,-4 9 1,0 3-119,-1 13 1,-1-2 25,1-16 0,-1 0-1779,-1 13 1,0 1 1772,0-8 1,-1-2 230,1 2 1,-1 1-164,-1-10-169,-3 14 18,0 33 366,-7 22-344,-5 20 0,-2 6-17,3 9 0,2 6 879,4-9 0,3 2-894,-1-1 0,1 4 0,0-1-36,3-5 1,1 0 0,0 0-90,1 1 0,1 0 0,0 0-202,1-3 0,1 0 1,1-1-620,4 17 1,2-2-2663,6-4 0,0-5 1405,-4-20 0,1-3 2012,16 17 1,-21-39 0,-1-2-1</inkml:trace>
+  <inkml:trace contextRef="#ctx0" brushRef="#br0" timeOffset="25242">8346 7773 16409,'-39'-47'1994,"0"0"0,4 4 0,4 8-1635,9 12 246,10 0-622,24 11 22,7-3-27,17 5-34,26 2 19,-9 3 1,4 0-203,-11 1 1,3 0 186,-1 0 0,7 0 1,0 0-1,-6 0-395,5-1 0,-1 1 454,6-2 1,4-1-1,-7 0 10,-15 1 0,-4 0 0,21-6 50,-34 6 45,-16 4-23,-10 6-55,-3 1 388,-20 20-394,4 3-33,-4 8 1043,8 10-1027,16 7-16,8-1-6,17 3 16,14-23 23,-1-14 23,17-9 122,-9-15 163,11-10 22,-27-2 1,-3-3-85,7-11 203,-3-19-51,-27 2-309,-11-1-83,-6 2 27,-20 11-10,-16 12-40,7 5-70,5 12 0,1 4-344,0 10-68,-6 2-2379,24 16 2002,13-3 0,3-3 0,3-6 0</inkml:trace>
+  <inkml:trace contextRef="#ctx0" brushRef="#br0" timeOffset="25869">11340 7399 17939,'-10'-62'1153,"0"1"1,5 8 0,-8 12-352,-46 25-606,8 28-126,13 0 0,0 6-31,5 7 0,3 6-22,0 5 0,4 2-246,5-6 0,4 2 248,-3 19 1,5 2-366,9-17 0,2 0 371,2 16 0,6-1 8,5-14 1,7-3 76,6-4 0,5-4-65,5-4 0,4-5 14,3-5 0,2-5-198,2-3 1,0-5 261,-2-6 0,0-3 48,-5-3 0,-3-4 24,-6-3 0,-3-3-55,4-12 742,-14-21-776,-22 19-55,-10-12-29,-17 20 228,-9 11-239,-4 13 0,11 7-50,-10 17 6,22 3 527,-4 14-785,19 0 39,11-6-1215,34 15-472,16-20-2288,6-9 0,7-4 4227,-1-9 0,-2-3 0,-11 1 0,-5-3 0,-12-2 0,0 0 0</inkml:trace>
+  <inkml:trace contextRef="#ctx0" brushRef="#br0" timeOffset="26193">12177 7618 17109,'12'-54'1656,"-1"0"0,-1 6 0,-9 9-938,-19 19-242,-14 11-308,1 11 112,-25 18-213,17 7-191,12-7 1,2 4 156,-5 21-16,12 1 39,15-1 113,17-8-119,5-11 34,17-13 0,4-5-28,3-2-277,5-5 0,2-3 423,5-13-71,-23 3 1,-1-2 170,15-19-49,-17-4 93,-15-3-234,-19-1-39,-12 2-28,-17 5 577,-11 8-644,-4 10-113,0 9-336,3 15-1774,6 10-7586,11 12 8468,10-5 1,10-6 0,8-13-1</inkml:trace>
+  <inkml:trace contextRef="#ctx0" brushRef="#br0" timeOffset="26620">14339 7413 19535,'17'-48'884,"0"-1"1,0 0 0,4-14 0,-4 8-218,-8 7 220,-11 22-803,-2 15 117,-6 19-190,-1 17-6,-3 20-22,6-15 1,2 3-206,0 4 1,1 1 39,1 4 0,2 1-537,0 2 1,2 1-335,1 1 0,2 0-905,1-2 1,2-1 1358,3-1 0,1-4 0,2 4 0,1-13 1</inkml:trace>
+  <inkml:trace contextRef="#ctx0" brushRef="#br0" timeOffset="27302">14809 7490 15129,'21'-40'1284,"0"0"0,0 0 0,7-14 0,-7 8-561,-11 9 28,-11 13-644,-10 11 99,-13 9-128,-19 11 23,-17 11-481,23-3 0,0 3 458,-2 2 1,0 3-1,1 0 1,1 3 38,-1 5 1,4 1-73,-10 10-23,23-14 0,4 0 207,8 5-195,6 8-6,15-3-17,18-4-39,24-5-9,-18-18 1,4-2-1552,20-2 1,1-3 1578,-17-1 1,-1-3 5,18-2 1,-2-3-60,-26 0 0,-3-3 154,5-1 1,-2-2 781,14-13-666,-16-4 21,-13-2 12,-8 1 123,-6-4-78,-3 7-146,-1 3 3442,0 4-3134,1 2 200,2-2-547,-1 5 90,1 3-102,-2 8 23,0 1-745,-1 1 197,-1 8-416,0 0-705,0 6-1692,2-2 3249,0 0 0,0-6 0,0 0 0</inkml:trace>
+  <inkml:trace contextRef="#ctx0" brushRef="#br0" timeOffset="28068">13589 7339 17552,'11'-51'1465,"-1"0"1,-2 9-1,0 5-238,2 0-947,-6 24 45,-1-5-381,-2 16-28,-5 13 163,-5 14-68,-2 8 0,0-3 0,-1 3-6,0 0 1,1 1-6,-1 0 0,1 2 5,-1 6 1,1 4 0,2-3-113,4-4 0,1-1 110,-1 22 0,4-2 36,15 2 22,11-14 68,4-16 67,3-15-101,-4-11 124,10-15 50,-7-10 145,11-23-184,-11 2 22,-3-9-5,-15 16-130,-6 11 158,-3 7-236,-3 13 169,-1 0-387,0 4 129,7 14-79,3 4-162,9 14-298,4 1-626,4 1 179,-6-6-8795,10 8 9810,-15-17 0,2 1 1,-12-14-1</inkml:trace>
+  <inkml:trace contextRef="#ctx0" brushRef="#br0" timeOffset="28235">14086 7425 21730,'-25'-19'-1967,"-1"0"1,-16-15 0,51 48 0,-6-10 0</inkml:trace>
+  <inkml:trace contextRef="#ctx0" brushRef="#br0" timeOffset="28835">15176 7490 16628,'-4'-6'5517,"1"2"-4974,3 4 465,0 0-935,-16 1 0,6 12 5,-12 3-16,15 8 39,8-1 95,12-3 61,11-3-27,13-8 11,8-7 16,2-11 57,-2-8 17,-9-10-79,-10-6-79,-12-5-117,-8 6 96,-18-14-74,-7 19 0,-15-7-38,-5 20-24,2 10 7,1 13-23,3 10 17,8 4-45,-2 34-247,17-5-358,5-12 0,4 2-849,7-3 1,4-1-3435,5 0 1,2-2 2502,12 17 0,-5-21 0,-17-22 0</inkml:trace>
+  <inkml:trace contextRef="#ctx0" brushRef="#br0" timeOffset="30676">5333 9652 14101,'12'-56'1366,"0"1"1,1-1 0,-2 4 0,-1 1 0,-2 8-791,-5-11 433,-1 1-253,-2 25-532,0 5-95,0 11-297,-1 12 84,-1 10 112,-2 14-6,-2 36-16,1-13 2,1-6 1,1 1 41,-1 18-36,2-23 0,1 1 5,1 0 1,1-2 3,0 15 55,1-11 73,0-27 393,-1-8-96,0-19-409,-1-10-17,0-10 39,1-3 1,0-1-17,-1-7 11,1 2 0,0-2 53,-1 9 1,0 3-43,1 0 1,-1 2 44,1-28-56,-1 33-68,0 13-228,0 9 256,3 31 1,2 6-3,-1-1 0,0 1-3,2 17-17,-3-16 1,0 1-65,-2 5 0,0 1-404,1 2 1,-2 1-3028,0 9 1,-1-4-5989,-1 12 9489,0-12 0,1-33 0,1-8 0</inkml:trace>
+  <inkml:trace contextRef="#ctx0" brushRef="#br0" timeOffset="31386">7537 9821 21573,'8'-51'804,"0"1"1,1-1 0,-1 4-116,-2 4-308,-2 5-420,-5 21-40,-4 23 113,-3 21-29,0 8 1,-1 4 5,-3 23-997,5-17 0,-1 7 0,3-6 972,1-10 0,1 0-44,-1 11 0,0 5 1,2-3-975,0 5 0,2-1 660,-1-9 1,0 2-1,1-1-556,1 17 1,1-2-868,0-4 0,2-5-1409,3 7-2431,2-30 2466,4-71 3169,-6 11 0,-1-3 730,2-20 1,-1-2-647,-3 13 0,0-2 1973,-2-5 0,0-5 0,-1 5-1105,-1 7 1,1 2-389,-1 0 0,0-4 0,0 3 718,-2-1 1,-1-1-74,-3 0 1,-1-4 0,0 3-1067,1 0 0,0 0 14,-1-3 0,-1-3 0,3 11 1335,5 5-1469,14-25-18,18 30-11,-6 13 1,4 3 5,4 3 0,3 4-17,10 6 0,0 6 11,-15-1 1,-1 4-20,9 9 0,-4 5 1,-1 23-2,-17-9 1,-7 4 47,-9-7 1,-7-1 10,-8 6 1,-7-3-355,-11-8 1,-3-5 331,5-3 0,-3-3 9,-8 1 0,0-2 348,8-6 0,1-1-394,-8 0 1,1-1-827,-9 0-1520,16-4-1045,30-3 3417,12-1 0,-7 1 0,0 1 0</inkml:trace>
+  <inkml:trace contextRef="#ctx0" brushRef="#br0" timeOffset="31743">8432 9398 23237,'-46'18'67,"0"0"0,5 0 1,10 4-35,20 31-16,15-4 56,11-7 106,13-11-61,-3-13 229,11-8 370,-5-11-309,0-7-77,-1-9 28,-14-20-236,-7-2-101,-7-3 6,-6 6 34,-8 0 22,-10-10-45,2 9-235,2 4-560,11 29 319,8 10-1294,8 15 219,2-4 1512,32 29 0,-29-31 0,19 14 0</inkml:trace>
+  <inkml:trace contextRef="#ctx0" brushRef="#br0" timeOffset="32009">9034 9422 24536,'-30'-17'33,"-1"-1"1,-15 2-22,46 44 4,13 20-5,7-14 1,3 1-655,8 15 626,-7-17 1,1-1-40,9 11-185,-12-9-162,2 15-409,-26-13-1054,-17-5-3354,-17-8 5220,0-10 0,9-9 0,13-4 0</inkml:trace>
+  <inkml:trace contextRef="#ctx0" brushRef="#br0" timeOffset="32185">8832 9400 13474,'0'-6'6498,"0"2"-5395,0 4-1154,-2 32-548,3 5-1129,1-2 0,0 0-6315,5 14 8043,2-7 0,-6-28 0,-1-7 0</inkml:trace>
+  <inkml:trace contextRef="#ctx0" brushRef="#br0" timeOffset="32492">9462 9716 20826,'26'-43'332,"1"0"1,0 0-1,-3 3 1,-1 0 0,-3 3-283,-1-5 1,-2-1 49,-2 4 1,-2-4 0,0 3 61,-1-4 1,-2 0 86,5-15 1,-3 0-54,-6 20 0,-5 5-6,-13-13-179,0 25 943,-21 15-971,1 22 1,-11 14 16,21-5 0,1 5-9,1 6 1,3 3-601,3 9 0,3 4 575,3 6 1,3 3-61,3-18 1,3 2 0,1-1-109,1 0 0,1 0 0,2-1-297,6 19 1,2-3-297,3-5 0,3-3-519,0-5 1,1-3-1410,0-7 1,1-2 2722,12 13 0,-13-21 0,-11-15 0</inkml:trace>
+  <inkml:trace contextRef="#ctx0" brushRef="#br0" timeOffset="32669">9529 9555 19255,'-3'-3'4391,"0"1"-3131,3 2-1339,61-63-6343,-11 40 2938,2-12 1,3 3 3483,-19 24 0,-4 6 0,12-2 0,-21 2 0</inkml:trace>
+  <inkml:trace contextRef="#ctx0" brushRef="#br0" timeOffset="34103">3025 3402 9548,'16'-53'1514,"-1"0"0,3-5 0,-1 3-226,-5 20 1,0 3-57,5-12 1,-1 3-578,3-8 521,0 4-622,-15 35-599,0 3 12,-6 17 178,-9 30-94,2-3-1675,-3 13 1,-2 2 1657,1 2-4,2-2 1,0 1 5,6-20 1,1-1 8,0 10 0,0-2-17,1 8 191,5-8 610,-1-33 16,3-7-621,4-18-168,8-34-39,-2 7 1563,-3 5 1,0-2-1525,0-18-37,-5 22 1,-1-1 2,-1 3 1,-1 1 44,-1-25 112,-3 8-140,1 26-22,-3 7-95,2 18-1,0 4 35,-3 17-12,0 11-12,1 7-318,1 18-577,7-3 387,0 2-4340,10-4 1,2-1 2948,-1-9 1,-2-5 0,-1-6 0,-8-22 0</inkml:trace>
+  <inkml:trace contextRef="#ctx0" brushRef="#br0" timeOffset="34335">3709 3202 23103,'25'-13'352,"10"-1"-492,3 6 0,4 1-926,-8 0 1,0 1 987,0 0 0,-3 1 0,-1 1 0,-15 3 0</inkml:trace>
+  <inkml:trace contextRef="#ctx0" brushRef="#br0" timeOffset="35125">3178 4861 17944,'-28'56'616,"1"-1"0,-3-1 0,-1-11-28,-7-23 67,-8-1 438,-1-10-499,16-12-376,9-4 135,13-16-123,9-6-152,3-3-8,8 2 0,4-1-8,15-12-343,-5 11 0,2 2 295,-3 8 0,2 4 8,24-11-38,-10 13 10,14 14 0,-27 8-65,24 30 54,-35 7 11,-8-7 1,-5 2-323,-12 21 324,-9-21 0,-8 4 1,2-3-540,0-5 0,-3 0 541,-9 10 0,-5 5 1,-2-4 2,5-9 1,-1-3 0,0-1 13,2-2 0,0 0 0,0-2 43,0-3 0,0 0 0,4-6 754,-19 2-476,21-22-18,16-15-128,11-12 186,9 2-326,15-8-22,27 5-37,-18 15 1,1 2 2,1 1 1,2 2-68,15 6 0,0 3 110,-13 4 1,1 1-601,17 2 1,1 3-679,-10 1 0,0 1 1241,5 2 0,-4-1 0,7 2 0,-7-2 0</inkml:trace>
+  <inkml:trace contextRef="#ctx0" brushRef="#br0" timeOffset="35293">3874 5287 17865,'-5'-2'2263,"2"1"-6245,3 1 3982,9 1 0,-7 0 0,7 0 0</inkml:trace>
+  <inkml:trace contextRef="#ctx0" brushRef="#br0" timeOffset="36052">2932 7737 11900,'-6'-5'6867,"1"1"-6287,-14-23 0,-1-6 69,11-1-478,-8-8 0,7-1-14,35 0-776,-1 20 1,2 2 663,23-12 2,-3 11 1,1 2-31,-13 9 0,1 1-12,13-2 1,1 1-9,-12 7 0,-3 4-36,26 11 355,-13 12-389,-15 14 73,-18 10 11,-23 8 11,-3-25 1,-6-1 52,-12 5 1,-3-3-41,9-9 1,-1-1 70,-11 3 0,0-3 286,-4-4 231,-3-2 71,15-8-403,14-6 894,9-4-1089,10-3-52,6-2-21,12-2-12,12 4 0,10 3-22,7 9-23,3 7 1,-3 10 236,-6 7-237,-13 5 12,-14 2 5,-19 2-5,-17-1-68,-16-3-95,-15-4-196,-10-6-687,-2-8-898,1-8-5349,9-7 7315,17-6 0,16 0 0,10 0 0</inkml:trace>
+  <inkml:trace contextRef="#ctx0" brushRef="#br0" timeOffset="36252">3959 7704 17143,'-7'2'3775,"2"-1"-3702,5-1-4448,0 0 4375,-10 14 0,7-11 0,-7 12 0</inkml:trace>
+  <inkml:trace contextRef="#ctx0" brushRef="#br0" timeOffset="37093">2803 9911 17143,'15'-47'1290,"1"1"0,0-2 0,-2 4-366,-2 1 281,2-17-869,-5 24 437,-4-7-566,-5 32-258,0-1 18,-1 14 44,-6 16-5,-15 32-1,10-21 1,-2 1-575,-4 13 0,0-1 569,-5 16 3,10-23 0,3 0-121,2 27 118,8-5 39,11-10 39,18-30-38,-1-17 38,26-23-45,-25 5 1,-1-4-190,10-5 1,0-3 219,7-9 1,-1-1-125,-10 8 1,-2 1 79,-2 2 0,-3 1 103,9-11 0,-16 17-95,-5 6 38,-6 8-111,-9 16 45,-2 2 17,-6 38-17,4-20-25,-1 5 0,0 1-211,3 11 281,3 0-1880,6-8 1,4-2-2383,5 0 4217,0-5 0,1-3 0,-5-12 0,1-1 0</inkml:trace>
+  <inkml:trace contextRef="#ctx0" brushRef="#br0" timeOffset="37252">3984 9949 19244,'0'-3'4206,"0"1"-3865,0 2-1153,-25-19-415,19 20 1227,-13-5 0,21 12 0,4 6 0</inkml:trace>
+  <inkml:trace contextRef="#ctx0" brushRef="#br0" timeOffset="38559">3070 2427 13732,'0'-3'3293,"0"0"-2744,0 3-448,-98 5-79,67 2 1,0 0-341,-10-2 0,-5-1 1,4 3 333,-4 7 1,4 2-341,1-3 1,0 0 337,-12 4 0,-1-1 3,0-1 0,0 0 5,-6-2 1,4 0-18,18-5 1,2-1-3,0 0 0,2-1-9,-9 1-50,13 0-62,-8 4-66,21-1 687,5 3-598,7 4 1006,2 7-944,2 5 33,2 6 33,1 19-10,0-14-210,-1-6 0,0 1 198,0 21-11,0-19 0,0 4 11,-1 3 0,0 3 11,1 4 1,-1 2-716,-1 7 1,0 2 707,-1-18 0,1 2 0,-1 0-2,-1 4 0,0 0 0,0 0 5,-2 4 1,1 1 0,-2 0-1,0 3 1,0 1 0,-1 0 0,1-12 1,0 1 0,-1-1-1,1 2-527,-1 1 0,0 0 1,-1 0-1,1 1 529,-1 1 0,0 0 0,0 0 0,1 1-3,-1 0 0,0 0 0,0 0 1,0 3-417,0-4 1,1 3 0,-1 1 0,0-2 0,1-3 404,-1 11 1,0-3 0,0 3-143,2-11 0,0 2 0,-1 2 0,1-2 0,1-3 151,-1 10 1,1-3 0,1 2-9,-1-4 1,1 3-1,-1 1 1,1 0-96,0-1 1,1 0-1,-1 0 1,1 0 95,-1 1 1,1 0 0,0 0 0,0 1-79,0-1 0,0 1 0,0 0 0,0 0 81,-1 0 1,1 0 0,0 1 0,-1-1 23,1 2 0,-1-1 1,0 1-1,0 0 31,0 0 0,0 0 1,0 0-1,0 0 3,0 1 0,-1 0 1,0 0-1,1 1-16,-1-1 1,1 0 0,-1 0-1,1 0-22,0-11 1,1-1-1,-1 0 1,1 0 0,-1 0 4,0 13 1,1-1 0,-1 0 0,1 0-10,0 0 0,-1 0 0,1 0 0,1 0-31,-1-1 0,1-1 0,0 1 0,1-1 28,-1 0 0,0-1 1,0 0-1,0 0-17,0-1 1,0 0 0,0-1 0,0 0 9,-1 0 0,0 0 0,0-2 0,0-2-3,-1 4 0,0-2 0,-1 2 18,-1 2 1,-2 3 0,0 0 0,0-4 1,0-2 0,0-3 1,-1 3-17,1 0 1,-1 3 0,0 2-1,1-2-7,1-5 1,1 1 0,0-2 0,1-4-8,0-1 1,0-4 0,2 3 1,0 15 0,0 2 1,3-4 461,2 0 0,3-2-469,-1-10 0,1 2 0,2-1-4,1-3 0,1 0 1,2-2 376,1-2 0,2-2 1,2 0-383,10 16 1,4-2-12,4-5 1,5-4-91,4-2 1,4-5-343,-12-14 1,2-3-1,2-2 379,7 0 0,2-2 0,-4-2 0,-4-1 0,-3-3 0,0-2 0,1-1 0</inkml:trace>
+  <inkml:trace contextRef="#ctx0" brushRef="#br0" timeOffset="40553">23244 1988 8114,'-1'-9'6363,"0"2"-5327,1 7-504,0 0-397,57-24-124,-30 18-6,8-7 1,4 2 22,10 11-726,10 3 737,-18-1 0,1 0 50,3 0 1,0 1 38,3-2 1,0 0 16,0 0 1,-1 0 10,-2-1 1,-1 0-9,-4-1 1,-2 1-38,-5 0 1,-2 0 524,18-1 89,-15 1-45,-12 3-70,-10 3-118,-6 6-358,-1 7 474,-1 10-504,1 9-328,1 13-1759,-2-11 0,-1 1 1414,1 22 348,-1-12 0,-2 2-271,0-12 1,-1 1 582,1 14 0,-1 2 50,0 3 1,0 2-61,0-20 0,0 2 0,0-1-3,1 2 0,0-1 0,-1 1-1,1 2 1,0 1 0,-1 0-288,2 1 1,-1 0 0,0 2 252,1 1 1,-1 1-1,1 1-416,0 0 1,-1 1 0,1 0 360,0 2 1,0 0-1,0 0 1,1 1 1,-1 0 0,0 1 5,0 1 0,0 1 0,0-2-19,-1-12 0,1-1 1,-1 3 42,0 3 0,1 4 0,-1 0 0,0-3-22,-1-1 0,0-3 0,0 3 23,1 2 1,-1 3 0,0 2 0,0-3 35,-1 7 0,0-2 1,-1 0-15,1 1 1,-2-1-1,1 1-1,-1-1 0,0 1 0,0-1-6,0 0 0,0 1 0,1-3-25,-1-13 1,2-2 0,-1 4 14,1 11 0,0 8 0,1-2 0,-1-8-17,0 2 0,1-1-2,-1-2 1,0 7 0,0 2 0,0-9 308,-1-9 1,0-6 0,0 1-311,0 0 1,-1 1 0,0 2 2,-1 2 0,-1 3 1,0 1-1,1-3 5,-2-1 0,1-3 0,-1 2-6,0 8 1,-1 1 0,0 2 1,-2 5 0,1 1 1,0-3-1,2-15 0,2-3 1,-1 3-8,-1 2 1,1 2 0,0 2 0,0-3-1,1 8 0,1-3 0,0 0-4,0 1 0,1 0 0,0 0 2,1 0 0,0-1 0,1 0-2,-1 1 0,1 0 0,0-3 2,0 10 0,0 2 11,0-5 1,-1 5-1,-1-5 0,-2 3 0,-1-1-2,1-3 1,-1 3-1,-3-2 2,0-12 1,-1-1-1,-2-1-94,-2 1 0,0-1 0,-2 0 79,-4 1 0,-1-1 0,0-1-7,-6 8 0,-4-1-236,-7-4 1,-7 2 0,-3-4-2212,8-16 0,-2-3 1,-2 0-1,2-1 1755,-7 10 1,1 0 0,0-4 0,1-6 0,1-4 0,10-5 0,10-6 0</inkml:trace>
+  <inkml:trace contextRef="#ctx0" brushRef="#br0" timeOffset="52051">7038 12554 16566,'-34'-42'1568,"-1"0"0,10 6 1,-3 12-1483,-21 33 1,-2 17-1077,14 0 1,1 5 1019,1-1 0,-2 4 0,3 2-19,6 1 0,2 1 1,3 1-16,1 2 0,3 1 0,2 0-17,3 0 1,3 0 0,2 0-36,3 14 0,6-1-14,7-8 0,8-4-1510,15-6 1,5-6 1571,-9-12 0,3-4 38,19-4 1,0-8 347,3-15-305,-8-3 0,2-8 4,0-13 1,-1-5 129,-1-3 1,-1-3-55,-12 9 0,-2-4 0,-3 1 29,-2-13 0,-7 0 28,-4 0 1,-6 0-74,-7 2 0,-5 3-17,-5 4 1,-4 3-32,-3 6 1,-5 4-48,-2 7 0,-2 4 2628,-17-3-2698,9 18 0,1 6-17,-3 7-64,-3 11 0,2 7 5,16-1 0,4 4-1113,-10 13 0,3 4 817,9-1 0,5 2-312,3 3 1,5-1 181,2-10 1,5 1-2826,16 13 0,7-4-1093,11-3 4448,-1-11 0,0-4 0,-10-17 0,2-3 0</inkml:trace>
+  <inkml:trace contextRef="#ctx0" brushRef="#br0" timeOffset="52578">7503 12788 14501,'19'-42'1579,"1"0"1,-1 0-1,6-14 1,-6 6-611,-11 3 3,-5 16-731,-3 15-346,-1 10-85,0 11 232,1 12-64,0 31 28,0-8 13,0-3 1,0 1 8,0 20-269,-1-22 1,-1-1 240,-1 19-17,-1 2 163,3-34 184,6-2-83,10-32-146,16-20-45,-8 9 0,1-3 25,4-3 0,1-2 5,0 1 0,-1 1-2,15-14-14,-18 20 0,-2 3-64,4 5-34,3 4 5,-10 25 29,-8 6-12,2 23 18,-3 0 10,3 12-17,-2-25 1,1-2 11,6 9-11,10-4 16,7-19-14,-6-11 1,4-4-81,2-3 1,2-3 96,8-6 0,0-4 31,-7-5 0,-2-3 61,-2-4 1,-3-2 41,-2-1 1,-4-2 36,-4 0 1,-2-1-84,-6 2 0,-3 0 318,-1-21-185,-19 11-150,-12 14-74,-14 14-22,-1 12 742,-1 17-770,7 15-50,6 20-71,16-18 1,3 3-202,2 3 0,3 2-418,5 1 1,4 0-2299,5 0 1,4-3 3065,1-5 0,1-3 0,9 7 0,-10-18 0</inkml:trace>
+  <inkml:trace contextRef="#ctx0" brushRef="#br0" timeOffset="54014">10040 12646 12673,'1'-5'6257,"0"1"-4879,5-56 369,-9 21-1523,5 3 0,-2 0 437,-14 1-246,-4 19-214,-13 3-89,-12 11-45,-16 18-36,12 8 0,-1 5-23,13-8 1,0 3-486,0 2 0,-3 5 0,5-1 482,1 3 1,3 2-14,-6 5 0,4 3-40,9 1 0,6-3 4,3 12 16,29-4 56,23-36-9,-7-12 1,2-4 2,8-6 1,2-6-792,-5-5 1,2-3 0,-2 0 801,3-2 1,-2-3 31,-4 0 1,0-4-1,-5 1-436,-5-3 1,-4-1 434,5-11 1,-2-3-34,-5-1 0,-2-2-23,-3-2 1,-1-1 15,-3 13 0,-1-2 0,-1 4 394,1-2 0,-2 3-373,2-3 0,-2 5 499,-4 1-555,-3 20-28,-1-2 2318,-7 35-2285,1 0 6,-12 38-9,10-23 1,0 1 176,-2 11 1,1 3-278,-1 5 0,2 1-110,1 2 1,0 0-124,2 2 1,2-1-127,3-1 1,4-3-350,3-4 1,5-3 178,4-7 0,6-4 30,6-5 1,4-7 186,3-4 1,5-7 240,14-7 1,1-6-168,-17-1 0,0-3 492,17-9 1,-3-5 120,-21 3 1,-3-4 287,10-13 1,-2-3-191,-10 6 0,-3-2-9,-1-6 1,-4 0 806,-1-8-321,-9-3 133,-11 16-700,-9 8 507,-13 10-730,-13 24-29,3 5-5,-15 20-28,7 2 260,19-12 0,1 1-283,-13 22-44,17 3 56,14-19 156,17 0-106,12-21 0,15-7 17,7-15 25,-14-4 0,-1-5 16,-6 0 1,-1-1-31,0-1 0,-2-1 157,9-26-3150,-11-1 3066,-5 11 571,-3-9-482,-9 36-173,-2-2-67,-4 13-1,-6 11 23,-11 9 3381,-9 17-3423,10-6 0,1 1-14,-8 14-23,14-12 1,3 1-163,7 7-179,18 15 285,1-20-64,9-13 1,4-5 86,3-7 39,0-5 0,2-4 67,-5-10 1,-1-4 30,1 0 0,0-3-100,2-5 1,-3-3 202,13-18 35,-11 3-79,-10 11 112,-6 4-34,-10 15-134,-1 3-50,-6 8 11,-5 9-1,0 2 196,-4 9-251,6-2-57,9 10 85,11-9 22,4-1-22,17-12 34,3-9 38,-8-4 1,1-4 72,22-13-3408,-5-5 3487,-14-8 95,-12 5 213,5-17-325,-12 17 196,-2-5 202,-9 20-398,-3 5 3235,-1 4-3420,-1 8-39,-10 19 56,2-1-3,-7 13 0,-3 6-22,3-8 0,0 2-503,-8 17 1,-1 4 3,2-2 1,3-1-692,3-8 1,2 2 1214,4-2 0,2 3 0,2-7 0,-1 6 0,4-10 0,0-1 0</inkml:trace>
+  <inkml:trace contextRef="#ctx0" brushRef="#br0" timeOffset="55034">6364 13635 13845,'-44'-2'117,"0"0"1,1 0 0,-7 0-1,6 0 2291,-13 2-2470,43 1 1423,30 6-1009,30 5-178,-2-2 0,8 0-349,-4-2 1,4 0-1,3-1 217,-2 0 0,2-2 1,3 1-1,1-1-192,-3 0 1,1-1 0,2 0 0,1-1 0,2 1 163,-4-1 0,1 0 0,1 0 0,1 0 0,0 0 0,2 0-272,-5 0 0,0 0 0,2-1 0,0 1 0,1-1 0,0 1 0,0-1 261,-4 1 1,0-1-1,1 0 1,0 1-1,1-1 1,0 0-1,-1 1 1,1-1-157,2 0 0,-1 1 1,1-1-1,0 0 1,0 0-1,0 1 1,0-1-1,1 0 151,-1 0 1,0 0 0,1 0-1,-1 0 1,1 0 0,-1 0-1,0-1 1,0 1-62,-1-1 0,-1 1 1,0-1-1,0 0 1,0 1-1,0-2 1,-1 1-1,0 0 54,6-1 0,-1 0 0,0-1 1,-1 1-1,1-1 0,-2 0 0,1-1 8,-4 0 0,0 0 0,-1-1 1,0 0-1,0 0 0,-1-1 1,0 0 7,5-2 1,-1 0-1,0 0 1,0-2-1,-1 1 1,-1-2-1,-2 0 0,0 0 1,0-1-1,-2-1 1,0 1-1,-3-1-2,11-2 1,-3 1 0,-1-2 0,2-1 13,-7 1 1,1-2-1,1 0 1,-1-1 0,-1-1-26,0-1 0,-1-2 1,0 0-1,-1-1 1,1-1-6,1 1 1,0-2 0,-1 0 0,1 0 0,1-2-5,-6 2 0,2-1 0,-1-1 0,0 0 0,-1-1 1,-2 1 5,0-2 0,-1 0 0,-2 0 0,-1 0 0,1 0 20,9-7 0,1 0 0,-2 1 1,-3 0 4,3-1 1,-2 0 0,0-1 86,-5 4 1,2-2 0,-2 1-1,-5 1 101,8-8 1,-4-1 126,-5 5 0,0-3 0,-5 1-242,-7-3 1,-7 1 587,-5 2 1,-5-1-678,-7 3 0,-4 0-20,-5 0 1,-4 2 743,-6-1 0,-4 2-747,-5-2 1,-5 3 887,-7-1 0,-5 3-860,-11-1 1,-1 2-1,7 6 1,-4 2 2,6 5 1,-6-1-1,-1 1 1,1 1 0,-7 0 0,2 1 1,-5-1-349,9 3 0,-4-1 1,-1 0-1,0 0 1,4 2 335,2 0 0,4 1 0,0 1 1,-6 0-2,4 0 0,-4 1 0,-3-1 1,0 1-1,1 0 0,4 0-403,-7 0 1,3 1 0,0 0 0,-3 0 404,7 1 0,-4 0 0,0-1 0,-2 1 0,3 1 0,1 0-2,1 1 1,2 1 0,1 0 0,0 0 0,0 1 3,-12 0 0,1 0 0,0 0 0,0 2 4,-1 0 0,1 1 0,0 1 0,-1 0-5,11 0 0,-1 0 0,1 0 0,0 0 0,2 1-1,-3 0 1,3 0 0,-1 0-1,-4 1 2,2 0 0,-3 0 0,-3 0 0,-1 1 0,2-1 0,3 0-301,-9 2 0,3-1 0,-1 1 0,-3 0 296,6-1 0,-3 0 1,-3 1-1,0 0 1,2 0-1,2 0-4,-2 0 0,1 0 0,2 0 0,0 1 0,0-1 2,1 1 0,1 0 1,-1 0-1,1 0 1,1 1 4,2-1 1,0 1 0,1-1 0,0 2 0,1-1-5,-10 3 1,1 0-1,0 1 1,2 0-15,3 0 0,2 1 0,-1 0 1,-1 1 22,1 1 0,-2 1 1,0 1-1,0 0 0,3-1 0,1 0 0,2-1 0,1 1 0,-3 0 130,3 0 1,-2 1 0,-1 1 0,1-2 0,4 0-130,-12 4 0,5-1 0,0-1-26,0 1 1,0-1 0,3-1 32,-8 3 0,1 1 13,9-3 0,-2 1 1,5 0 508,4 0 1,1 1-534,-14 8 0,2 1 227,23-6 1,4 2-228,7 1 0,4 3 22,5 3 0,6 4 20,4 7 0,6 2 63,4 10 0,5 1-75,-1-14 0,2 1 0,2-1-2,2 3 0,2 0 0,1 0-6,3 0 0,1 0 1,2-2-18,2 0 1,2-2 0,1-1-16,1-2 1,2-1 0,1-3-46,1-1 1,2-2 0,1-2-204,2-2 1,1-2 0,0-2-1715,3-1 0,0-2 1,0-1 1971,-5-2 0,0-2 0,-3-1 0,2 0 0,-4-3 0,6 2 0</inkml:trace>
+  <inkml:trace contextRef="#ctx0" brushRef="#br0" timeOffset="57033">17081 10559 16505,'8'-49'1144,"1"0"1,-1 4-1,-4 4-147,-14-9-476,-1 13-291,-4 6 306,-2 11-318,-2 10-55,-14 1-99,0 9 1,-4 4-18,0 3 1,-3 3-183,-1 3 0,-2 3 0,3 0 146,1 1 1,3 2-12,-5 3 0,3 4 11,14 0 0,4 0-11,-4 8-73,7 1 1,4 2 89,10 2 0,8 16-17,3-25 45,15-3 83,2-15 180,21-9-173,-1-19-79,0-7 288,-20 1 1,-1-4-253,2-10 1,-1-3-20,2-5 0,-1-2-233,-1 1 0,-1-4 221,-6 6 1,-1-2 0,-1 1-890,2-4 1,-1 1 869,3-9 0,0-1 117,-2-1 1,-2 6-82,-2 2-51,-3 5 1,-2 3 107,-5 12-96,0-2-90,-3 24-145,-1 8 117,-5 25 107,-2 15-22,0-6 0,1 4-232,-1 5 0,1 1 184,-1 5 0,1 2-62,2 1 1,1 1-82,1 0 0,1 0-95,3-2 0,3 0-146,2-4 1,4-1 305,3-5 0,4-2-580,3-6 0,4-4-1154,3-5 1,3-6 1528,23 3 202,-7-18 0,2-6 63,-16-3 0,0-3 202,15-4 1,-1-3 30,-14-2 1,-4-3 22,-2-4 0,-2 0 17,9-18 404,-15 8 0,-3-1-370,-2-2 128,-4-1 0,-4-1 147,-6 0 489,-15-18-860,-8 30-117,-6 7 3144,-10 18-3167,1 15 17,-12 12-17,4 15-2832,9 10 2821,14-7 83,17-10 1,5 1-90,12 8-5,12 14 28,3-28 39,14-9 156,9-18 52,3-11-94,-22-1 1,-1-4 148,11-28-67,-11-9-44,-9-6-24,-9 0 24,-6 8 3423,-3 10-3446,-5 15-128,1 12-186,-1 8 11,2 5-73,-2 13 197,-2 8-34,0 19-67,0 8-79,8 6-27,10 3-46,14 0 79,-7-30 0,4-1-121,13-1 1,3-4-314,17 4 490,-11-14 0,-2-4 67,-2-10 39,-9 0 1,0-6 201,18-27-5,-7-6-120,-25 16 0,-5-1 248,-3-13-90,-9 11-122,-8 10-74,-2 9-83,-1 6 344,4 3-412,2 4 212,9 4-128,7 4 34,15 4 23,16-2-1,11-5 51,3-5 134,-5-9 67,-8-8-150,-15-4 195,1-27-83,-13 9 10,3-16 17,-10 17-11,-5 11-162,-3 11-325,-2 7 212,-1 43 46,-1 18-627,0-4 1,-1 5 597,-2 7 1,0 1-499,-1-15 1,0 1 0,-1 0 477,-1 4 0,0 1 0,0 0-573,-1 3 0,-1 1 1,1-1 250,0 3 1,1-1 0,0 0-535,2-1 1,0-1 0,2-1-2340,2-5 1,2-2 0,0-3 3220,1 4 0,2-7 0,5 7 0,-5-39 0</inkml:trace>
+  <inkml:trace contextRef="#ctx0" brushRef="#br0" timeOffset="58011">20163 10264 17546,'10'-59'1704,"0"0"1,-2 6 0,-7 9-1257,-18 14-213,-16 14-89,-16 13-99,18 9 1,-1 5-204,-3 4 0,1 5 178,0 5 0,1 4-415,3 3 0,4 4 398,6 2 1,4 2 2,4 0 1,5 1-321,8-2 1,4 0 314,4-4 0,4-2-18,6-3 0,4-3 57,3-4 0,2-4 42,2-4 0,2-4 146,31-3 33,-3-19 6,-5-18-135,-30 7 1,-3-4-236,-2-4 1,-3-4 182,-5-4 0,-3-2-18,-2-2 0,-4-1-5,-5 1 0,-3 1 5,-2 5 1,-3 1 52,-19-20 493,-6 16-655,-1 15 568,2 12-652,3 18 24,6 14-456,1 34 304,12-10 126,8-7 1,6 1-895,22 14 291,-3-20 1,4-1-531,8-3 0,5-3 155,4-3 0,2-5 411,5-4 1,0-5 582,2-4 1,-1-5 276,-2-6 0,-2-3-5,-10 1 0,-2-4 579,10-14 1,-4-5-319,-13 7 0,-2-1 228,11-12 1,-3-1-9,-9 7 1,-4 2 538,11-24-242,-13 15-420,-10 15-199,-6 13-411,-4 11 815,-2 13-709,-4 14-11,-2 15 12,1 9-1,3 3-2945,4 7 2939,3-23 6,3 0 51,-1-27 168,2-3 72,1-7-106,6-11-73,10-9-67,-1-3 3,2 0 0,2-1-31,12-5 1670,-10 9 1,1 1-1721,19 2-12,-18 11-22,5 13 45,-13 9 11,6 10-5,2 3 16,4 2 11,2-4-11,5-4 1,5-8-7,8-8-5,6-13-169,-27-1 0,-1-2 194,1-5 0,-1-2 3,-3-4 0,-1-3 14,-3-2 1,-2-3 21,-3-1 1,-2-1 103,8-28-3181,-11 1 3091,-10 22-2147,-20-4 2069,3 26-23,-17-3-55,9 14-141,-14 27 119,14-6 146,-2 24-646,19 17 297,6-20 946,5-1 1,7 1-2067,12-5 0,5-2-1171,5 2 0,2-1 2594,6 1 0,0-4 0,6-1 0,-20-16 0</inkml:trace>
+  <inkml:trace contextRef="#ctx0" brushRef="#br0" timeOffset="58743">22597 9814 13963,'-44'-38'408,"0"0"0,1 0 0,-1 0 1,0 0-1,1 3 0,0 1 1,-1 2-1,1 0 0,-1 3-1174,-5-3 1,1 3 0,-1 1-1,-4 1 818,4 3 1,-3 2 0,-2 0 0,0 1-1,0 1-260,1 2 0,1 1 0,-2 1 0,-1-1 0,-3 1 229,6 1 1,-2 0 0,-1 0-1,-2 0 1,-1 1 0,0 0-1,-1 0-69,4 2 0,0 0 0,0 0 0,-1 1 0,-1 0 0,-1 0 1,-2 1-1,-1 0 61,7 2 1,-2 1 0,-1 0 0,-2 0-1,0 0 1,0 1 0,-1 0 0,0 0-1,1 0 1,1 1 0,0 0-94,-1 1 1,1-1-1,0 1 1,0 1-1,0 0 1,0 0 0,1 0-1,0 0 1,-1 1-1,1 0 88,-6 0 1,0-1 0,0 1 0,0 0 0,1 1-1,-1 0 1,1 0 0,0 2 0,1 1-13,3 0 1,-1 1 0,1 1 0,0 0 0,0 1 0,2 1 0,0 0 0,1 0 0,2 1 26,-4 2 0,2 0 0,1 1 0,1 1 1,0 0-1,-1 1 0,-1 1-5,0 0 1,-2 0 0,0 0 0,0 1 0,-1 2 0,0 0 0,0 1 0,1 2 14,4 1 1,-1 1 0,0 2-1,-1 0 1,1 2 0,1-1-1,2 1 1,1-2 0,3 0-9,-7 2 0,3 0 0,2-2 0,1 2 1,0 1-1,-2 3 13,0 2 1,-2 2-1,-1 1 1,1 2-1,2 1 1,2 0-1,6 0-4,-2 7 1,5 1 0,3 1 0,2-1 0,0-1-35,-5 2 0,1-1 0,2 0 0,4 5 45,5-2 0,1 5 0,3 1 0,4-1 0,7-4-51,6 6 0,9-2 1,8 1 31,5-8 1,5 3 0,5 0 0,1-1 0,0-5-6,0-1 0,1-4 0,2-1 0,4-1-7,2-2 1,3-1 0,3-1-1,3-1 1,5-4-13,-3-6 0,4-2 1,4-2-1,1-2 1,3-1-1,1 0 1,0 1-25,-6-3 0,2 0 0,1-1 1,1-1-1,1 0 0,1 0 0,1 0 1,0 0-1,1 1 7,-5-2 0,1 1 0,1 0 1,0 0-1,1 0 0,1-1 0,0 0 1,0 0-1,0 0 0,0-1 1,0 0 2,-3-2 1,1 0 0,0 0 0,1-1 0,0 0-1,0 0 1,0 0 0,-1-1 0,-1 0 0,-2-1-1,-1 1 1,-2-1-25,8 1 0,-3-1 0,-2-1 0,-1 1 0,-1-1 1,1-1-1,0 0 0,3 0 22,-1 0 1,2 0 0,1-1 0,0 0 0,1-1 0,-1 0 0,-1 0 0,-1 0 0,-2-1-13,5-1 1,-2 0-1,-2 0 1,0-1-1,0-1 1,3 0-1,3-1-14,-7 0 0,3-1 0,2 0 1,1-1-1,1 0 0,0 0 1,-1-2-1,0 1 0,-2 0 1,-2-1 18,6-1 1,-3 0 0,0-1-1,-2 0 1,1 0 0,-1-1-1,1-1 1,0 0 8,-3 0 0,1-1 0,0 0 0,0 0 1,0-1-1,0-1 0,-2 1 0,-2-1 1,-2 0 0,12-5 1,-2-1 0,-3-1 0,-1 1-1,-2-1 1,-2 1 12,-1 1 0,-2 0 1,-2 1-1,-1-2 0,1-1 59,3-2 1,1-1 0,-1-2-1,-2 1 1,-3 0-26,-3 1 1,-4 1-1,0-2 1,0-3 53,-1-1 1,0-2 0,1-3-1,-3 0 1,-4 1 30,6-14 1,-5 0 0,-7-3-48,-6-6 1,-8-4 0,-9 5 275,-11-2 0,-17 2-348,-4 21 0,-10-1 0,-6 0 0,0 1 1,3 5 168,-5-3 0,1 6 0,-10-3-213,15 10 0,-6-1 1,-4-2-1,-3-1 0,-3 0 1,0 1-1,0 1 0,2 1 1,3 4-181,-3-1 0,1 3 0,1 2 0,1 1 0,-1 0 0,-1-1 0,-2 0 15,1-1 1,-1-1-1,-1 0 1,-1-1-1,-1 1 1,0 1-1,0 1 1,-1 1 206,1 2 0,-2 1 0,-2 1 0,-1 0 0,1 1 0,3 1 0,2 0 0,5 1 0,6 1 0,-21-4 0,11 2 0,-5 0 0,8 3 0,-1-1 0,1 1 0,0-1 0,-1 1 0</inkml:trace>
+  <inkml:trace contextRef="#ctx0" brushRef="#br0" timeOffset="60226">10414 11074 12400,'34'-52'1594,"-1"1"1,-5 5-1,-17 10-1292,-45 24-55,3 14 0,-4 6 22,-12 7 0,-5 5-1309,9 0 0,-1 3 0,-2 3 1065,5-2 0,0 1 0,-1 2 1,-1 1-46,-5 4 0,-1 1 1,0 1-1,0 1-363,6-5 1,0 1 0,0 0 0,0 1 0,0 0 283,-1 1 1,-1 0-1,1 1 1,-1 0 0,1 0-39,0 0 0,0 1 0,0-1 0,0 1 1,1-1-45,1 0 1,0 0 0,1 0-1,0 0 1,1-1-123,-8 6 1,1 0 0,1 0-1,1-3-133,4-3 1,1-1 0,1-1-1,0-2-412,-4 2 1,0-3 0,1-3-814,-8 1 1,1-9 555,11-12 0,2-9 902,6-9 1,4-7 217,4-9 0,5-5 790,3-9 1,4-1-736,2 7 0,3-3 763,3-2 0,2-4 0,1 4-416,4-4 1,2 0 226,2-3 0,2-3 0,0 4-244,1 7 1,3 3 554,6-13 0,2 5 2058,9-4-2277,-11 22 1,1 2 145,24-12-260,9 16-353,-22 17 0,3 5-517,7 7 0,2 7 354,10 6 1,3 5-91,-12-2 1,1 3 0,1 1-526,-7-3 1,1 1-1,1 0 1,1 1 386,4 3 0,1 0 0,1 0 0,1 0-37,-7-4 0,0 0 0,1 0 0,1 0 0,0-1-341,2 1 1,1-1 0,1 0 0,0-1 0,0 0 499,6 1 0,2 1 0,-1-2 0,-1-1 0,-6-2 0,4 2 0,-4-2 0,-2-2 0,-2-3 0,-1 1 0,0-1 0</inkml:trace>
+  <inkml:trace contextRef="#ctx0" brushRef="#br0" timeOffset="64523">19148 11713 16140,'2'-45'1502,"1"0"1,-1 0 0,0-10 0,0 7-831,0 11-504,-2 22-118,0 10-128,-2 12 128,-5 15-33,-6 24-399,-2 4 385,3-8 0,-2 3-1,0-3 1,-1 6-6,-3 3 0,-2 10 1,-1 0-1,2-6-621,3-10 1,1-3-1,-1 3 621,-1 1 1,-2 5 0,-1 2 0,1-3 0,2-8 10,-2 3 1,1-4-12,-7 15 0,-2 1 3,9-18 0,-1 0 0,-2 0-4,-1 2 1,0 0-1,-3 1 7,-6 9 1,-2 2 0,-1-2-1,-3-1 1,-1-1 0,-3-2-602,-1-1 1,-2-2-1,-2-2 611,-2-2 0,-2-2 1,-1-2-13,-2-2 1,-1-1 0,-2-3-197,14-9 1,0-1-1,-2-1 1,-2-1 198,-11 2 0,-4-2 0,-1 0 1,5-2-326,1-1 0,3-1 0,-5 0 321,10-4 0,-4-1 0,-1 1 0,1-2 0,2 0 3,-12 0 1,2-1 0,-2-1-185,4 1 0,-3-1 0,-2 0 0,1-1 174,11-1 0,1 0 1,-1 0-1,-1-1 1,-2 0 2,0 0 0,-2 0 0,-2-1 1,1 0-1,0 0 0,1 0-94,-7 0 1,2-1 0,-1 1 0,2-1 0,-1 0 99,1 0 0,2 0 1,-1 0-1,0-1 0,-2 0 7,2-1 0,-3-1 1,-1 0-1,2-1 1,2 1-1,6-1-68,-9 1 1,6-1 0,-9-1 66,10-1 1,-8 0 0,-5-1 0,-2 0 0,2-1-1,5 1 1,10 0-33,-7 0 0,9 0 1,-5-1 39,6 0 1,-6 0 0,-3-1 0,1-1 0,4 1-1,10 1 15,-11-4 0,3-1 32,7 0 0,-6-2 0,0 0 0,8 0 509,-1 0 1,1-2-512,-12-7 1,-6-3 0,10 2-45,20 8 0,1-2-6,-9-7 0,-4-5 0,7 4-16,-8-11-15,4-5 1,2-1-9,13 8-17,3-5 0,4-2 17,8-7 22,5 15 1,2-2-6,13-25 5,-1 21 1966,7 2-1988,0 15 1291,-6 12-1308,4 0 57,-10 14 2315,0 29-2305,-3-5-8,-7 16 0,-1 5-8,-3 4-23,-4 1 1,-2 3 16,4-17 0,-1 2 7,0 8 1,-1 6 0,1-4-8,0-3 0,1-1 5,3-5 1,-1 2 0,2-4 13,0-5 1,1-1 10,-3 6 1,0 0-25,2-7 0,0-1 15,-5 8 1,1-5 62,1-10-6,-2 1 102,7-19-24,2-28-156,2 4 34,-2-37 16,6-1-27,2-5-9,2 17 0,0-1-269,2 4 1,1-2 267,0 0 0,2-3 0,0 1-7,3-11 0,2 0-5,-2 10 1,1-3 0,0 6-2,-2 4 0,0 4-3,1-3 1,1 1-1224,2 4 0,-1 4 1215,6-9-1070,0 7 1,3 0 1074,12 1-139,-4 9 1,2 1 138,15-4-5,-3 11 0,-1 4 11,-3 3-11,6 8 0,-2 1-12,-7 2 123,0 5 0,-1 1-117,-4 2 2129,10 5-2107,-24-9 18,-9-3 3223,-7-5-3134,-4-1 592,-2 0-682,-11-8-33,2 3 0,-32-12 27,16 8-19,-8 0 1,-4 2 19,-14 2-12,12 1 1,-2 1-6,-13 5 2,10 3 1,1 2-329,14 2 1,0 2 319,-13 5 1,0 4-9,9 2 0,2 3 11,1 5 1,1 1 2,7-6 0,1 2 11,-7 17 0,3-1-11,1 1 5,1 4 1,1 0-6,4 1-49,7-16 0,0 0 38,0 8 11,5-14-34,2-6 17,4-13 23,0-1-1,1-7 623,0-1-1065,0-5-2007,-2-2 2444,0-5 0,1 5 0,-1 2 0</inkml:trace>
+</inkml:ink>
+</file>
+
 <file path=ppt/slideLayouts/slideLayout1.xml><?xml version="1.0" encoding="utf-8"?>
 <p:sldLayout xmlns:a="http://schemas.openxmlformats.org/drawingml/2006/main" xmlns:r="http://schemas.openxmlformats.org/officeDocument/2006/relationships" xmlns:p="http://schemas.openxmlformats.org/presentationml/2006/main" type="title" preserve="1">
   <p:cSld name="Title Slide">
@@ -6841,6 +6929,57 @@
           </a:prstGeom>
         </p:spPr>
       </p:pic>
+      <mc:AlternateContent xmlns:mc="http://schemas.openxmlformats.org/markup-compatibility/2006">
+        <mc:Choice xmlns:p14="http://schemas.microsoft.com/office/powerpoint/2010/main" Requires="p14">
+          <p:contentPart p14:bwMode="auto" r:id="rId3">
+            <p14:nvContentPartPr>
+              <p14:cNvPr id="2" name="Ink 1">
+                <a:extLst>
+                  <a:ext uri="{FF2B5EF4-FFF2-40B4-BE49-F238E27FC236}">
+                    <a16:creationId xmlns:a16="http://schemas.microsoft.com/office/drawing/2014/main" id="{C2A2BB31-E0F1-A375-A386-B92C9695DE4F}"/>
+                  </a:ext>
+                </a:extLst>
+              </p14:cNvPr>
+              <p14:cNvContentPartPr/>
+              <p14:nvPr/>
+            </p14:nvContentPartPr>
+            <p14:xfrm>
+              <a:off x="489960" y="690480"/>
+              <a:ext cx="8262000" cy="4307760"/>
+            </p14:xfrm>
+          </p:contentPart>
+        </mc:Choice>
+        <mc:Fallback>
+          <p:pic>
+            <p:nvPicPr>
+              <p:cNvPr id="2" name="Ink 1">
+                <a:extLst>
+                  <a:ext uri="{FF2B5EF4-FFF2-40B4-BE49-F238E27FC236}">
+                    <a16:creationId xmlns:a16="http://schemas.microsoft.com/office/drawing/2014/main" id="{C2A2BB31-E0F1-A375-A386-B92C9695DE4F}"/>
+                  </a:ext>
+                </a:extLst>
+              </p:cNvPr>
+              <p:cNvPicPr/>
+              <p:nvPr/>
+            </p:nvPicPr>
+            <p:blipFill>
+              <a:blip r:embed="rId4"/>
+              <a:stretch>
+                <a:fillRect/>
+              </a:stretch>
+            </p:blipFill>
+            <p:spPr>
+              <a:xfrm>
+                <a:off x="480600" y="681120"/>
+                <a:ext cx="8280720" cy="4326480"/>
+              </a:xfrm>
+              <a:prstGeom prst="rect">
+                <a:avLst/>
+              </a:prstGeom>
+            </p:spPr>
+          </p:pic>
+        </mc:Fallback>
+      </mc:AlternateContent>
     </p:spTree>
     <p:extLst>
       <p:ext uri="{BB962C8B-B14F-4D97-AF65-F5344CB8AC3E}">
